--- a/documents/HyunahKwon/design/designing/for_pro_pt/배트와 달트_평가pt.pptx
+++ b/documents/HyunahKwon/design/designing/for_pro_pt/배트와 달트_평가pt.pptx
@@ -218,7 +218,7 @@
           <a:p>
             <a:fld id="{009FF73D-6F29-4AE3-91AA-92916D4CDA50}" type="datetimeFigureOut">
               <a:rPr lang="ko-KR" altLang="en-US" smtClean="0"/>
-              <a:t>2026-09-23</a:t>
+              <a:t>2026-09-26</a:t>
             </a:fld>
             <a:endParaRPr lang="ko-KR" altLang="en-US"/>
           </a:p>
@@ -852,7 +852,7 @@
           <a:p>
             <a:fld id="{7DE7A7EA-A08D-470B-B559-5CA3F8390285}" type="datetime1">
               <a:rPr lang="ko-KR" altLang="en-US" smtClean="0"/>
-              <a:t>2026-09-23</a:t>
+              <a:t>2026-09-26</a:t>
             </a:fld>
             <a:endParaRPr lang="ko-KR" altLang="en-US"/>
           </a:p>
@@ -1127,7 +1127,7 @@
           <a:p>
             <a:fld id="{FDF2BABD-D50F-477D-84CB-5D40968424E6}" type="datetime1">
               <a:rPr lang="ko-KR" altLang="en-US" smtClean="0"/>
-              <a:t>2026-09-23</a:t>
+              <a:t>2026-09-26</a:t>
             </a:fld>
             <a:endParaRPr lang="ko-KR" altLang="en-US"/>
           </a:p>
@@ -1539,7 +1539,7 @@
           <a:p>
             <a:fld id="{C57D668C-6E84-42F9-9906-46DC33168E70}" type="datetime1">
               <a:rPr lang="ko-KR" altLang="en-US" smtClean="0"/>
-              <a:t>2026-09-23</a:t>
+              <a:t>2026-09-26</a:t>
             </a:fld>
             <a:endParaRPr lang="ko-KR" altLang="en-US"/>
           </a:p>
@@ -1850,7 +1850,7 @@
           <a:p>
             <a:fld id="{E9C1F742-AC6F-4B04-B096-246F25AAABD2}" type="datetime1">
               <a:rPr lang="ko-KR" altLang="en-US" smtClean="0"/>
-              <a:t>2026-09-23</a:t>
+              <a:t>2026-09-26</a:t>
             </a:fld>
             <a:endParaRPr lang="ko-KR" altLang="en-US"/>
           </a:p>
@@ -2141,7 +2141,7 @@
           <a:p>
             <a:fld id="{BAC38453-487A-456C-8ABA-CA04D0FA2C77}" type="datetime1">
               <a:rPr lang="ko-KR" altLang="en-US" smtClean="0"/>
-              <a:t>2026-09-23</a:t>
+              <a:t>2026-09-26</a:t>
             </a:fld>
             <a:endParaRPr lang="ko-KR" altLang="en-US"/>
           </a:p>
@@ -2339,7 +2339,7 @@
           <a:p>
             <a:fld id="{0378BFDD-022C-4656-AF62-A4DA34510370}" type="datetime1">
               <a:rPr lang="ko-KR" altLang="en-US" smtClean="0"/>
-              <a:t>2026-09-23</a:t>
+              <a:t>2026-09-26</a:t>
             </a:fld>
             <a:endParaRPr lang="ko-KR" altLang="en-US"/>
           </a:p>
@@ -2646,7 +2646,7 @@
           <a:p>
             <a:fld id="{AE0895E6-717A-4F75-ADB4-B202670E9437}" type="datetime1">
               <a:rPr lang="ko-KR" altLang="en-US" smtClean="0"/>
-              <a:t>2026-09-23</a:t>
+              <a:t>2026-09-26</a:t>
             </a:fld>
             <a:endParaRPr lang="ko-KR" altLang="en-US"/>
           </a:p>
@@ -2829,7 +2829,7 @@
           <a:p>
             <a:fld id="{5D4A0848-C9C3-4A93-A53E-CF6B3EBD1104}" type="datetime1">
               <a:rPr lang="ko-KR" altLang="en-US" smtClean="0"/>
-              <a:t>2026-09-23</a:t>
+              <a:t>2026-09-26</a:t>
             </a:fld>
             <a:endParaRPr lang="ko-KR" altLang="en-US"/>
           </a:p>
@@ -3146,7 +3146,7 @@
           <a:p>
             <a:fld id="{9DE5F09D-BE0B-48A3-8BDC-AB8B03466D34}" type="datetime1">
               <a:rPr lang="ko-KR" altLang="en-US" smtClean="0"/>
-              <a:t>2026-09-23</a:t>
+              <a:t>2026-09-26</a:t>
             </a:fld>
             <a:endParaRPr lang="ko-KR" altLang="en-US"/>
           </a:p>
@@ -3387,7 +3387,7 @@
           <a:p>
             <a:fld id="{5CBBB230-5E29-4037-8D23-54C6F2389DA6}" type="datetime1">
               <a:rPr lang="ko-KR" altLang="en-US" smtClean="0"/>
-              <a:t>2026-09-23</a:t>
+              <a:t>2026-09-26</a:t>
             </a:fld>
             <a:endParaRPr lang="ko-KR" altLang="en-US"/>
           </a:p>
@@ -3950,7 +3950,7 @@
           <a:p>
             <a:fld id="{7F0C8396-AA9F-46F9-B914-59E3D5D9787E}" type="datetime1">
               <a:rPr lang="ko-KR" altLang="en-US" smtClean="0"/>
-              <a:t>2026-09-23</a:t>
+              <a:t>2026-09-26</a:t>
             </a:fld>
             <a:endParaRPr lang="ko-KR" altLang="en-US"/>
           </a:p>
@@ -4460,7 +4460,9 @@
         </p:nvSpPr>
         <p:spPr/>
         <p:txBody>
-          <a:bodyPr/>
+          <a:bodyPr>
+            <a:normAutofit/>
+          </a:bodyPr>
           <a:lstStyle/>
           <a:p>
             <a:r>
@@ -4471,6 +4473,7 @@
               <a:rPr lang="ko-KR" altLang="en-US" dirty="0"/>
               <a:t> 권현아 김진아</a:t>
             </a:r>
+            <a:endParaRPr lang="en-US" altLang="ko-KR" dirty="0"/>
           </a:p>
         </p:txBody>
       </p:sp>
@@ -5030,8 +5033,8 @@
         </p:nvSpPr>
         <p:spPr>
           <a:xfrm>
-            <a:off x="175347" y="814353"/>
-            <a:ext cx="2954748" cy="3970318"/>
+            <a:off x="175346" y="814353"/>
+            <a:ext cx="3139645" cy="3970318"/>
           </a:xfrm>
           <a:prstGeom prst="rect">
             <a:avLst/>
@@ -5092,6 +5095,13 @@
               </a:rPr>
               <a:t>6/5 </a:t>
             </a:r>
+            <a:br>
+              <a:rPr lang="en-US" altLang="ko-KR" dirty="0">
+                <a:solidFill>
+                  <a:sysClr val="windowText" lastClr="000000"/>
+                </a:solidFill>
+              </a:rPr>
+            </a:br>
             <a:r>
               <a:rPr lang="ko-KR" altLang="en-US" dirty="0">
                 <a:solidFill>
@@ -5821,7 +5831,7 @@
           <a:p>
             <a:fld id="{18237D24-2CAA-4876-B233-E2CBDD55D5AC}" type="datetime1">
               <a:rPr lang="ko-KR" altLang="en-US" smtClean="0"/>
-              <a:t>2026-09-23</a:t>
+              <a:t>2026-09-26</a:t>
             </a:fld>
             <a:endParaRPr lang="ko-KR" altLang="en-US"/>
           </a:p>
@@ -6705,7 +6715,7 @@
           <a:p>
             <a:fld id="{1A57F442-498B-4DB2-AB17-B1698D9D7579}" type="datetime1">
               <a:rPr lang="ko-KR" altLang="en-US" smtClean="0"/>
-              <a:t>2026-09-23</a:t>
+              <a:t>2026-09-26</a:t>
             </a:fld>
             <a:endParaRPr lang="ko-KR" altLang="en-US"/>
           </a:p>
@@ -8778,7 +8788,7 @@
           <a:p>
             <a:fld id="{95BD25ED-67EA-4877-93D4-C60BFC02D928}" type="datetime1">
               <a:rPr lang="ko-KR" altLang="en-US" smtClean="0"/>
-              <a:t>2026-09-23</a:t>
+              <a:t>2026-09-26</a:t>
             </a:fld>
             <a:endParaRPr lang="ko-KR" altLang="en-US"/>
           </a:p>
@@ -8902,7 +8912,7 @@
           <a:p>
             <a:fld id="{AE0895E6-717A-4F75-ADB4-B202670E9437}" type="datetime1">
               <a:rPr lang="ko-KR" altLang="en-US" smtClean="0"/>
-              <a:t>2026-09-23</a:t>
+              <a:t>2026-09-26</a:t>
             </a:fld>
             <a:endParaRPr lang="ko-KR" altLang="en-US"/>
           </a:p>
@@ -10392,7 +10402,7 @@
           <a:p>
             <a:fld id="{486B669A-3CB5-4204-B09E-9FA773DA862C}" type="datetime1">
               <a:rPr lang="ko-KR" altLang="en-US" smtClean="0"/>
-              <a:t>2026-09-23</a:t>
+              <a:t>2026-09-26</a:t>
             </a:fld>
             <a:endParaRPr lang="ko-KR" altLang="en-US"/>
           </a:p>
@@ -13584,7 +13594,7 @@
           <a:p>
             <a:fld id="{BEB409AF-FA65-4DE6-8EC6-3EAC7E510936}" type="datetime1">
               <a:rPr lang="ko-KR" altLang="en-US" smtClean="0"/>
-              <a:t>2026-09-23</a:t>
+              <a:t>2026-09-26</a:t>
             </a:fld>
             <a:endParaRPr lang="ko-KR" altLang="en-US"/>
           </a:p>
@@ -14411,7 +14421,7 @@
           <a:p>
             <a:fld id="{039E9397-BDBA-4058-A372-8E29F8AE5A2B}" type="datetime1">
               <a:rPr lang="ko-KR" altLang="en-US" smtClean="0"/>
-              <a:t>2026-09-23</a:t>
+              <a:t>2026-09-26</a:t>
             </a:fld>
             <a:endParaRPr lang="ko-KR" altLang="en-US"/>
           </a:p>
@@ -16371,7 +16381,7 @@
           <a:p>
             <a:fld id="{2952B0F8-8AFD-44F7-AC52-FB12EACBFFE0}" type="datetime1">
               <a:rPr lang="ko-KR" altLang="en-US" smtClean="0"/>
-              <a:t>2026-09-23</a:t>
+              <a:t>2026-09-26</a:t>
             </a:fld>
             <a:endParaRPr lang="ko-KR" altLang="en-US"/>
           </a:p>
@@ -17085,7 +17095,7 @@
           <a:p>
             <a:fld id="{7F5FFC04-6A78-4F8A-8685-FB0D34269C94}" type="datetime1">
               <a:rPr lang="ko-KR" altLang="en-US" smtClean="0"/>
-              <a:t>2026-09-23</a:t>
+              <a:t>2026-09-26</a:t>
             </a:fld>
             <a:endParaRPr lang="ko-KR" altLang="en-US"/>
           </a:p>
@@ -17417,7 +17427,7 @@
           <a:p>
             <a:fld id="{389104AA-B669-4CE8-A4C6-5B6FFB268D6D}" type="datetime1">
               <a:rPr lang="ko-KR" altLang="en-US" smtClean="0"/>
-              <a:t>2026-09-23</a:t>
+              <a:t>2026-09-26</a:t>
             </a:fld>
             <a:endParaRPr lang="ko-KR" altLang="en-US"/>
           </a:p>
@@ -17558,7 +17568,7 @@
           <a:p>
             <a:fld id="{AE0895E6-717A-4F75-ADB4-B202670E9437}" type="datetime1">
               <a:rPr lang="ko-KR" altLang="en-US" smtClean="0"/>
-              <a:t>2026-09-23</a:t>
+              <a:t>2026-09-26</a:t>
             </a:fld>
             <a:endParaRPr lang="ko-KR" altLang="en-US"/>
           </a:p>
@@ -17750,7 +17760,7 @@
           <a:p>
             <a:fld id="{492E84DF-9BBC-4DFC-AB92-EB3DF1902948}" type="datetime1">
               <a:rPr lang="en-US" altLang="ko-KR" smtClean="0"/>
-              <a:t>9/23/2026</a:t>
+              <a:t>9/26/2026</a:t>
             </a:fld>
             <a:endParaRPr lang="ko-KR" altLang="en-US"/>
           </a:p>
@@ -17916,7 +17926,7 @@
           <a:p>
             <a:fld id="{9B8908AF-E20B-41D4-AB43-0322C79507AA}" type="datetime1">
               <a:rPr lang="ko-KR" altLang="en-US" smtClean="0"/>
-              <a:t>2026-09-23</a:t>
+              <a:t>2026-09-26</a:t>
             </a:fld>
             <a:endParaRPr lang="ko-KR" altLang="en-US"/>
           </a:p>
@@ -20856,7 +20866,7 @@
           <a:p>
             <a:fld id="{B9C58E41-5846-43EB-8957-87949D773036}" type="datetime1">
               <a:rPr lang="ko-KR" altLang="en-US" smtClean="0"/>
-              <a:t>2026-09-23</a:t>
+              <a:t>2026-09-26</a:t>
             </a:fld>
             <a:endParaRPr lang="ko-KR" altLang="en-US"/>
           </a:p>
@@ -21432,7 +21442,7 @@
           <a:p>
             <a:fld id="{D1B82838-522B-45DA-BE36-90DBE328A7ED}" type="datetime1">
               <a:rPr lang="ko-KR" altLang="en-US" smtClean="0"/>
-              <a:t>2026-09-23</a:t>
+              <a:t>2026-09-26</a:t>
             </a:fld>
             <a:endParaRPr lang="ko-KR" altLang="en-US"/>
           </a:p>
@@ -21573,7 +21583,7 @@
           <a:p>
             <a:fld id="{17461BAB-6714-4163-82E8-A68EEA7006F7}" type="datetime1">
               <a:rPr lang="ko-KR" altLang="en-US" smtClean="0"/>
-              <a:t>2026-09-23</a:t>
+              <a:t>2026-09-26</a:t>
             </a:fld>
             <a:endParaRPr lang="ko-KR" altLang="en-US"/>
           </a:p>
@@ -21792,7 +21802,7 @@
           <a:p>
             <a:r>
               <a:rPr lang="ko-KR" altLang="en-US" dirty="0"/>
-              <a:t>숲 </a:t>
+              <a:t>산 </a:t>
             </a:r>
             <a:r>
               <a:rPr lang="en-US" altLang="ko-KR" dirty="0"/>
@@ -21800,7 +21810,7 @@
             </a:r>
             <a:r>
               <a:rPr lang="ko-KR" altLang="en-US" dirty="0"/>
-              <a:t>일반적이니 방법으로는</a:t>
+              <a:t>일반적인 방법으로는</a:t>
             </a:r>
             <a:br>
               <a:rPr lang="en-US" altLang="ko-KR" dirty="0"/>
@@ -21890,7 +21900,7 @@
           <a:p>
             <a:fld id="{890215CB-5935-4F11-935C-9C0AD5619A1E}" type="datetime1">
               <a:rPr lang="ko-KR" altLang="en-US" smtClean="0"/>
-              <a:t>2026-09-23</a:t>
+              <a:t>2026-09-26</a:t>
             </a:fld>
             <a:endParaRPr lang="ko-KR" altLang="en-US"/>
           </a:p>
